--- a/apps/resources/bundled_files/6-klass-masshtab-sabak.pptx
+++ b/apps/resources/bundled_files/6-klass-masshtab-sabak.pptx
@@ -5196,7 +5196,7 @@
                 </a:solidFill>
                 <a:latin typeface="PT Sans"/>
               </a:rPr>
-              <a:t>6-класс · Математика</a:t>
+              <a:t/>
             </a:r>
           </a:p>
         </p:txBody>
@@ -5688,7 +5688,7 @@
                 </a:solidFill>
                 <a:latin typeface="PT Sans"/>
               </a:rPr>
-              <a:t>6-класс ›</a:t>
+              <a:t/>
             </a:r>
           </a:p>
           <a:p>
@@ -6637,7 +6637,7 @@
                 </a:solidFill>
                 <a:latin typeface="PT Sans"/>
               </a:rPr>
-              <a:t>6-класс ›</a:t>
+              <a:t/>
             </a:r>
           </a:p>
           <a:p>
@@ -10020,7 +10020,7 @@
                 </a:solidFill>
                 <a:latin typeface="PT Sans"/>
               </a:rPr>
-              <a:t>6-класс ›</a:t>
+              <a:t/>
             </a:r>
           </a:p>
           <a:p>
@@ -14472,7 +14472,7 @@
                 </a:solidFill>
                 <a:latin typeface="PT Sans"/>
               </a:rPr>
-              <a:t>6-класс ›</a:t>
+              <a:t/>
             </a:r>
           </a:p>
           <a:p>
@@ -16055,7 +16055,7 @@
                 </a:solidFill>
                 <a:latin typeface="PT Sans"/>
               </a:rPr>
-              <a:t>6-класс ›</a:t>
+              <a:t/>
             </a:r>
           </a:p>
           <a:p>
@@ -16806,7 +16806,7 @@
                 </a:solidFill>
                 <a:latin typeface="PT Sans"/>
               </a:rPr>
-              <a:t>6-класс ›</a:t>
+              <a:t/>
             </a:r>
           </a:p>
           <a:p>
@@ -17518,7 +17518,7 @@
                 </a:solidFill>
                 <a:latin typeface="PT Sans"/>
               </a:rPr>
-              <a:t>6-класс ›</a:t>
+              <a:t/>
             </a:r>
           </a:p>
           <a:p>
@@ -19184,7 +19184,7 @@
                 </a:solidFill>
                 <a:latin typeface="PT Sans"/>
               </a:rPr>
-              <a:t>6-класс ›</a:t>
+              <a:t/>
             </a:r>
           </a:p>
           <a:p>
@@ -20268,7 +20268,7 @@
                 </a:solidFill>
                 <a:latin typeface="PT Sans"/>
               </a:rPr>
-              <a:t>6-класс ›</a:t>
+              <a:t/>
             </a:r>
           </a:p>
           <a:p>
@@ -21798,7 +21798,7 @@
                 </a:solidFill>
                 <a:latin typeface="PT Sans"/>
               </a:rPr>
-              <a:t>6-класс ›</a:t>
+              <a:t/>
             </a:r>
           </a:p>
           <a:p>
@@ -24304,7 +24304,7 @@
                 </a:solidFill>
                 <a:latin typeface="PT Sans"/>
               </a:rPr>
-              <a:t>6-класс ›</a:t>
+              <a:t/>
             </a:r>
           </a:p>
           <a:p>
@@ -25581,7 +25581,7 @@
                 </a:solidFill>
                 <a:latin typeface="PT Sans"/>
               </a:rPr>
-              <a:t>6-класс ›</a:t>
+              <a:t/>
             </a:r>
           </a:p>
           <a:p>
@@ -27009,7 +27009,7 @@
                 </a:solidFill>
                 <a:latin typeface="PT Sans"/>
               </a:rPr>
-              <a:t>6-класс ›</a:t>
+              <a:t/>
             </a:r>
           </a:p>
           <a:p>
@@ -28465,7 +28465,7 @@
                 </a:solidFill>
                 <a:latin typeface="PT Sans"/>
               </a:rPr>
-              <a:t>6-класс ›</a:t>
+              <a:t/>
             </a:r>
           </a:p>
           <a:p>
@@ -29754,7 +29754,7 @@
                 </a:solidFill>
                 <a:latin typeface="PT Sans"/>
               </a:rPr>
-              <a:t>6-класс ›</a:t>
+              <a:t/>
             </a:r>
           </a:p>
           <a:p>
@@ -30554,7 +30554,7 @@
                 </a:solidFill>
                 <a:latin typeface="PT Sans"/>
               </a:rPr>
-              <a:t>6-класс ›</a:t>
+              <a:t/>
             </a:r>
           </a:p>
           <a:p>
@@ -31395,7 +31395,7 @@
                 </a:solidFill>
                 <a:latin typeface="PT Sans"/>
               </a:rPr>
-              <a:t>6-класс ›</a:t>
+              <a:t/>
             </a:r>
           </a:p>
           <a:p>
@@ -32344,7 +32344,7 @@
                 </a:solidFill>
                 <a:latin typeface="PT Sans"/>
               </a:rPr>
-              <a:t>6-класс ›</a:t>
+              <a:t/>
             </a:r>
           </a:p>
           <a:p>
@@ -33798,7 +33798,7 @@
                 </a:solidFill>
                 <a:latin typeface="PT Sans"/>
               </a:rPr>
-              <a:t>6-класс ›</a:t>
+              <a:t/>
             </a:r>
           </a:p>
           <a:p>
@@ -34544,7 +34544,7 @@
                 </a:solidFill>
                 <a:latin typeface="PT Sans"/>
               </a:rPr>
-              <a:t>6-класс ›</a:t>
+              <a:t/>
             </a:r>
           </a:p>
           <a:p>
@@ -35352,7 +35352,7 @@
                 </a:solidFill>
                 <a:latin typeface="PT Sans"/>
               </a:rPr>
-              <a:t>6-класс ›</a:t>
+              <a:t/>
             </a:r>
           </a:p>
           <a:p>
@@ -36543,7 +36543,7 @@
                 </a:solidFill>
                 <a:latin typeface="PT Sans"/>
               </a:rPr>
-              <a:t>6-класс ›</a:t>
+              <a:t/>
             </a:r>
           </a:p>
           <a:p>
@@ -37738,7 +37738,7 @@
                 </a:solidFill>
                 <a:latin typeface="PT Sans"/>
               </a:rPr>
-              <a:t>6-класс ›</a:t>
+              <a:t/>
             </a:r>
           </a:p>
           <a:p>
@@ -37919,7 +37919,7 @@
                 </a:solidFill>
                 <a:latin typeface="PT Sans"/>
               </a:rPr>
-              <a:t>5-класс</a:t>
+              <a:t/>
             </a:r>
           </a:p>
         </p:txBody>
@@ -38099,7 +38099,7 @@
                 </a:solidFill>
                 <a:latin typeface="PT Sans"/>
               </a:rPr>
-              <a:t>6-класс</a:t>
+              <a:t/>
             </a:r>
           </a:p>
         </p:txBody>
@@ -38279,7 +38279,7 @@
                 </a:solidFill>
                 <a:latin typeface="PT Sans"/>
               </a:rPr>
-              <a:t>6-класс</a:t>
+              <a:t/>
             </a:r>
           </a:p>
         </p:txBody>
@@ -38515,7 +38515,7 @@
                 </a:solidFill>
                 <a:latin typeface="PT Sans"/>
               </a:rPr>
-              <a:t>7-класс</a:t>
+              <a:t/>
             </a:r>
           </a:p>
         </p:txBody>
@@ -38935,7 +38935,7 @@
                 </a:solidFill>
                 <a:latin typeface="PT Sans"/>
               </a:rPr>
-              <a:t>6-класс ›</a:t>
+              <a:t/>
             </a:r>
           </a:p>
           <a:p>
@@ -40083,7 +40083,7 @@
                 </a:solidFill>
                 <a:latin typeface="PT Sans"/>
               </a:rPr>
-              <a:t>6-класс ›</a:t>
+              <a:t/>
             </a:r>
           </a:p>
           <a:p>

--- a/apps/resources/bundled_files/6-klass-masshtab-sabak.pptx
+++ b/apps/resources/bundled_files/6-klass-masshtab-sabak.pptx
@@ -1582,7 +1582,7 @@
           <a:lstStyle/>
           <a:p>
             <a:r>
-              <a:t>Ой жүгүртүү маданияты (Wenxi Lee, 2.6).</a:t>
+              <a:t>Ой жүгүртүү маданияты (Wenxi Lee, 2,6).</a:t>
             </a:r>
           </a:p>
         </p:txBody>
